--- a/ゲーム科2年/00_前期/ゲームエンジンⅢ/バージョン管理/04_CommitとPush.pptx
+++ b/ゲーム科2年/00_前期/ゲームエンジンⅢ/バージョン管理/04_CommitとPush.pptx
@@ -266,7 +266,7 @@
           <a:p>
             <a:fld id="{E9CC885B-4903-4D54-9A93-00025F12DED9}" type="datetimeFigureOut">
               <a:rPr kumimoji="1" lang="ja-JP" altLang="en-US" smtClean="0"/>
-              <a:t>2025/1/16</a:t>
+              <a:t>2025/1/17</a:t>
             </a:fld>
             <a:endParaRPr kumimoji="1" lang="ja-JP" altLang="en-US"/>
           </a:p>
@@ -496,7 +496,7 @@
           <a:p>
             <a:fld id="{E9CC885B-4903-4D54-9A93-00025F12DED9}" type="datetimeFigureOut">
               <a:rPr kumimoji="1" lang="ja-JP" altLang="en-US" smtClean="0"/>
-              <a:t>2025/1/16</a:t>
+              <a:t>2025/1/17</a:t>
             </a:fld>
             <a:endParaRPr kumimoji="1" lang="ja-JP" altLang="en-US"/>
           </a:p>
@@ -736,7 +736,7 @@
           <a:p>
             <a:fld id="{E9CC885B-4903-4D54-9A93-00025F12DED9}" type="datetimeFigureOut">
               <a:rPr kumimoji="1" lang="ja-JP" altLang="en-US" smtClean="0"/>
-              <a:t>2025/1/16</a:t>
+              <a:t>2025/1/17</a:t>
             </a:fld>
             <a:endParaRPr kumimoji="1" lang="ja-JP" altLang="en-US"/>
           </a:p>
@@ -966,7 +966,7 @@
           <a:p>
             <a:fld id="{E9CC885B-4903-4D54-9A93-00025F12DED9}" type="datetimeFigureOut">
               <a:rPr kumimoji="1" lang="ja-JP" altLang="en-US" smtClean="0"/>
-              <a:t>2025/1/16</a:t>
+              <a:t>2025/1/17</a:t>
             </a:fld>
             <a:endParaRPr kumimoji="1" lang="ja-JP" altLang="en-US"/>
           </a:p>
@@ -1241,7 +1241,7 @@
           <a:p>
             <a:fld id="{E9CC885B-4903-4D54-9A93-00025F12DED9}" type="datetimeFigureOut">
               <a:rPr kumimoji="1" lang="ja-JP" altLang="en-US" smtClean="0"/>
-              <a:t>2025/1/16</a:t>
+              <a:t>2025/1/17</a:t>
             </a:fld>
             <a:endParaRPr kumimoji="1" lang="ja-JP" altLang="en-US"/>
           </a:p>
@@ -1570,7 +1570,7 @@
           <a:p>
             <a:fld id="{E9CC885B-4903-4D54-9A93-00025F12DED9}" type="datetimeFigureOut">
               <a:rPr kumimoji="1" lang="ja-JP" altLang="en-US" smtClean="0"/>
-              <a:t>2025/1/16</a:t>
+              <a:t>2025/1/17</a:t>
             </a:fld>
             <a:endParaRPr kumimoji="1" lang="ja-JP" altLang="en-US"/>
           </a:p>
@@ -2046,7 +2046,7 @@
           <a:p>
             <a:fld id="{E9CC885B-4903-4D54-9A93-00025F12DED9}" type="datetimeFigureOut">
               <a:rPr kumimoji="1" lang="ja-JP" altLang="en-US" smtClean="0"/>
-              <a:t>2025/1/16</a:t>
+              <a:t>2025/1/17</a:t>
             </a:fld>
             <a:endParaRPr kumimoji="1" lang="ja-JP" altLang="en-US"/>
           </a:p>
@@ -2187,7 +2187,7 @@
           <a:p>
             <a:fld id="{E9CC885B-4903-4D54-9A93-00025F12DED9}" type="datetimeFigureOut">
               <a:rPr kumimoji="1" lang="ja-JP" altLang="en-US" smtClean="0"/>
-              <a:t>2025/1/16</a:t>
+              <a:t>2025/1/17</a:t>
             </a:fld>
             <a:endParaRPr kumimoji="1" lang="ja-JP" altLang="en-US"/>
           </a:p>
@@ -2300,7 +2300,7 @@
           <a:p>
             <a:fld id="{E9CC885B-4903-4D54-9A93-00025F12DED9}" type="datetimeFigureOut">
               <a:rPr kumimoji="1" lang="ja-JP" altLang="en-US" smtClean="0"/>
-              <a:t>2025/1/16</a:t>
+              <a:t>2025/1/17</a:t>
             </a:fld>
             <a:endParaRPr kumimoji="1" lang="ja-JP" altLang="en-US"/>
           </a:p>
@@ -2643,7 +2643,7 @@
           <a:p>
             <a:fld id="{E9CC885B-4903-4D54-9A93-00025F12DED9}" type="datetimeFigureOut">
               <a:rPr kumimoji="1" lang="ja-JP" altLang="en-US" smtClean="0"/>
-              <a:t>2025/1/16</a:t>
+              <a:t>2025/1/17</a:t>
             </a:fld>
             <a:endParaRPr kumimoji="1" lang="ja-JP" altLang="en-US"/>
           </a:p>
@@ -2931,7 +2931,7 @@
           <a:p>
             <a:fld id="{E9CC885B-4903-4D54-9A93-00025F12DED9}" type="datetimeFigureOut">
               <a:rPr kumimoji="1" lang="ja-JP" altLang="en-US" smtClean="0"/>
-              <a:t>2025/1/16</a:t>
+              <a:t>2025/1/17</a:t>
             </a:fld>
             <a:endParaRPr kumimoji="1" lang="ja-JP" altLang="en-US"/>
           </a:p>
@@ -3204,7 +3204,7 @@
           <a:p>
             <a:fld id="{E9CC885B-4903-4D54-9A93-00025F12DED9}" type="datetimeFigureOut">
               <a:rPr kumimoji="1" lang="ja-JP" altLang="en-US" smtClean="0"/>
-              <a:t>2025/1/16</a:t>
+              <a:t>2025/1/17</a:t>
             </a:fld>
             <a:endParaRPr kumimoji="1" lang="ja-JP" altLang="en-US"/>
           </a:p>
@@ -3764,6 +3764,58 @@
           </a:prstGeom>
         </p:spPr>
       </p:pic>
+      <p:sp>
+        <p:nvSpPr>
+          <p:cNvPr id="2" name="正方形/長方形 1">
+            <a:extLst>
+              <a:ext uri="{FF2B5EF4-FFF2-40B4-BE49-F238E27FC236}">
+                <a16:creationId xmlns:a16="http://schemas.microsoft.com/office/drawing/2014/main" id="{20B9EFCF-F60B-47F1-8EB1-BD02FA4AAC80}"/>
+              </a:ext>
+            </a:extLst>
+          </p:cNvPr>
+          <p:cNvSpPr/>
+          <p:nvPr/>
+        </p:nvSpPr>
+        <p:spPr>
+          <a:xfrm>
+            <a:off x="717176" y="4760259"/>
+            <a:ext cx="2716306" cy="502023"/>
+          </a:xfrm>
+          <a:prstGeom prst="rect">
+            <a:avLst/>
+          </a:prstGeom>
+          <a:noFill/>
+          <a:ln w="38100">
+            <a:solidFill>
+              <a:srgbClr val="FF0000"/>
+            </a:solidFill>
+          </a:ln>
+        </p:spPr>
+        <p:style>
+          <a:lnRef idx="2">
+            <a:schemeClr val="accent1">
+              <a:shade val="50000"/>
+            </a:schemeClr>
+          </a:lnRef>
+          <a:fillRef idx="1">
+            <a:schemeClr val="accent1"/>
+          </a:fillRef>
+          <a:effectRef idx="0">
+            <a:schemeClr val="accent1"/>
+          </a:effectRef>
+          <a:fontRef idx="minor">
+            <a:schemeClr val="lt1"/>
+          </a:fontRef>
+        </p:style>
+        <p:txBody>
+          <a:bodyPr rtlCol="0" anchor="ctr"/>
+          <a:lstStyle/>
+          <a:p>
+            <a:pPr algn="ctr"/>
+            <a:endParaRPr kumimoji="1" lang="ja-JP" altLang="en-US"/>
+          </a:p>
+        </p:txBody>
+      </p:sp>
     </p:spTree>
     <p:extLst>
       <p:ext uri="{BB962C8B-B14F-4D97-AF65-F5344CB8AC3E}">

--- a/ゲーム科2年/00_前期/ゲームエンジンⅢ/バージョン管理/04_CommitとPush.pptx
+++ b/ゲーム科2年/00_前期/ゲームエンジンⅢ/バージョン管理/04_CommitとPush.pptx
@@ -266,7 +266,7 @@
           <a:p>
             <a:fld id="{E9CC885B-4903-4D54-9A93-00025F12DED9}" type="datetimeFigureOut">
               <a:rPr kumimoji="1" lang="ja-JP" altLang="en-US" smtClean="0"/>
-              <a:t>2025/1/17</a:t>
+              <a:t>2025/1/27</a:t>
             </a:fld>
             <a:endParaRPr kumimoji="1" lang="ja-JP" altLang="en-US"/>
           </a:p>
@@ -496,7 +496,7 @@
           <a:p>
             <a:fld id="{E9CC885B-4903-4D54-9A93-00025F12DED9}" type="datetimeFigureOut">
               <a:rPr kumimoji="1" lang="ja-JP" altLang="en-US" smtClean="0"/>
-              <a:t>2025/1/17</a:t>
+              <a:t>2025/1/27</a:t>
             </a:fld>
             <a:endParaRPr kumimoji="1" lang="ja-JP" altLang="en-US"/>
           </a:p>
@@ -736,7 +736,7 @@
           <a:p>
             <a:fld id="{E9CC885B-4903-4D54-9A93-00025F12DED9}" type="datetimeFigureOut">
               <a:rPr kumimoji="1" lang="ja-JP" altLang="en-US" smtClean="0"/>
-              <a:t>2025/1/17</a:t>
+              <a:t>2025/1/27</a:t>
             </a:fld>
             <a:endParaRPr kumimoji="1" lang="ja-JP" altLang="en-US"/>
           </a:p>
@@ -966,7 +966,7 @@
           <a:p>
             <a:fld id="{E9CC885B-4903-4D54-9A93-00025F12DED9}" type="datetimeFigureOut">
               <a:rPr kumimoji="1" lang="ja-JP" altLang="en-US" smtClean="0"/>
-              <a:t>2025/1/17</a:t>
+              <a:t>2025/1/27</a:t>
             </a:fld>
             <a:endParaRPr kumimoji="1" lang="ja-JP" altLang="en-US"/>
           </a:p>
@@ -1241,7 +1241,7 @@
           <a:p>
             <a:fld id="{E9CC885B-4903-4D54-9A93-00025F12DED9}" type="datetimeFigureOut">
               <a:rPr kumimoji="1" lang="ja-JP" altLang="en-US" smtClean="0"/>
-              <a:t>2025/1/17</a:t>
+              <a:t>2025/1/27</a:t>
             </a:fld>
             <a:endParaRPr kumimoji="1" lang="ja-JP" altLang="en-US"/>
           </a:p>
@@ -1570,7 +1570,7 @@
           <a:p>
             <a:fld id="{E9CC885B-4903-4D54-9A93-00025F12DED9}" type="datetimeFigureOut">
               <a:rPr kumimoji="1" lang="ja-JP" altLang="en-US" smtClean="0"/>
-              <a:t>2025/1/17</a:t>
+              <a:t>2025/1/27</a:t>
             </a:fld>
             <a:endParaRPr kumimoji="1" lang="ja-JP" altLang="en-US"/>
           </a:p>
@@ -2046,7 +2046,7 @@
           <a:p>
             <a:fld id="{E9CC885B-4903-4D54-9A93-00025F12DED9}" type="datetimeFigureOut">
               <a:rPr kumimoji="1" lang="ja-JP" altLang="en-US" smtClean="0"/>
-              <a:t>2025/1/17</a:t>
+              <a:t>2025/1/27</a:t>
             </a:fld>
             <a:endParaRPr kumimoji="1" lang="ja-JP" altLang="en-US"/>
           </a:p>
@@ -2187,7 +2187,7 @@
           <a:p>
             <a:fld id="{E9CC885B-4903-4D54-9A93-00025F12DED9}" type="datetimeFigureOut">
               <a:rPr kumimoji="1" lang="ja-JP" altLang="en-US" smtClean="0"/>
-              <a:t>2025/1/17</a:t>
+              <a:t>2025/1/27</a:t>
             </a:fld>
             <a:endParaRPr kumimoji="1" lang="ja-JP" altLang="en-US"/>
           </a:p>
@@ -2300,7 +2300,7 @@
           <a:p>
             <a:fld id="{E9CC885B-4903-4D54-9A93-00025F12DED9}" type="datetimeFigureOut">
               <a:rPr kumimoji="1" lang="ja-JP" altLang="en-US" smtClean="0"/>
-              <a:t>2025/1/17</a:t>
+              <a:t>2025/1/27</a:t>
             </a:fld>
             <a:endParaRPr kumimoji="1" lang="ja-JP" altLang="en-US"/>
           </a:p>
@@ -2643,7 +2643,7 @@
           <a:p>
             <a:fld id="{E9CC885B-4903-4D54-9A93-00025F12DED9}" type="datetimeFigureOut">
               <a:rPr kumimoji="1" lang="ja-JP" altLang="en-US" smtClean="0"/>
-              <a:t>2025/1/17</a:t>
+              <a:t>2025/1/27</a:t>
             </a:fld>
             <a:endParaRPr kumimoji="1" lang="ja-JP" altLang="en-US"/>
           </a:p>
@@ -2931,7 +2931,7 @@
           <a:p>
             <a:fld id="{E9CC885B-4903-4D54-9A93-00025F12DED9}" type="datetimeFigureOut">
               <a:rPr kumimoji="1" lang="ja-JP" altLang="en-US" smtClean="0"/>
-              <a:t>2025/1/17</a:t>
+              <a:t>2025/1/27</a:t>
             </a:fld>
             <a:endParaRPr kumimoji="1" lang="ja-JP" altLang="en-US"/>
           </a:p>
@@ -3204,7 +3204,7 @@
           <a:p>
             <a:fld id="{E9CC885B-4903-4D54-9A93-00025F12DED9}" type="datetimeFigureOut">
               <a:rPr kumimoji="1" lang="ja-JP" altLang="en-US" smtClean="0"/>
-              <a:t>2025/1/17</a:t>
+              <a:t>2025/1/27</a:t>
             </a:fld>
             <a:endParaRPr kumimoji="1" lang="ja-JP" altLang="en-US"/>
           </a:p>
@@ -5419,7 +5419,7 @@
         <p:spPr>
           <a:xfrm>
             <a:off x="567542" y="1216429"/>
-            <a:ext cx="7152920" cy="1938992"/>
+            <a:ext cx="7460697" cy="1938992"/>
           </a:xfrm>
           <a:prstGeom prst="rect">
             <a:avLst/>
@@ -5438,7 +5438,7 @@
             </a:r>
             <a:r>
               <a:rPr lang="ja-JP" altLang="en-US" sz="2400" dirty="0"/>
-              <a:t>でコピーしてきたフォルダを右クリックし、</a:t>
+              <a:t>でコピーしてきたフォルダ内で右クリックし、</a:t>
             </a:r>
             <a:endParaRPr lang="en-US" altLang="ja-JP" sz="2400" dirty="0"/>
           </a:p>

--- a/ゲーム科2年/00_前期/ゲームエンジンⅢ/バージョン管理/04_CommitとPush.pptx
+++ b/ゲーム科2年/00_前期/ゲームエンジンⅢ/バージョン管理/04_CommitとPush.pptx
@@ -266,7 +266,7 @@
           <a:p>
             <a:fld id="{E9CC885B-4903-4D54-9A93-00025F12DED9}" type="datetimeFigureOut">
               <a:rPr kumimoji="1" lang="ja-JP" altLang="en-US" smtClean="0"/>
-              <a:t>2025/1/27</a:t>
+              <a:t>2025/2/27</a:t>
             </a:fld>
             <a:endParaRPr kumimoji="1" lang="ja-JP" altLang="en-US"/>
           </a:p>
@@ -496,7 +496,7 @@
           <a:p>
             <a:fld id="{E9CC885B-4903-4D54-9A93-00025F12DED9}" type="datetimeFigureOut">
               <a:rPr kumimoji="1" lang="ja-JP" altLang="en-US" smtClean="0"/>
-              <a:t>2025/1/27</a:t>
+              <a:t>2025/2/27</a:t>
             </a:fld>
             <a:endParaRPr kumimoji="1" lang="ja-JP" altLang="en-US"/>
           </a:p>
@@ -736,7 +736,7 @@
           <a:p>
             <a:fld id="{E9CC885B-4903-4D54-9A93-00025F12DED9}" type="datetimeFigureOut">
               <a:rPr kumimoji="1" lang="ja-JP" altLang="en-US" smtClean="0"/>
-              <a:t>2025/1/27</a:t>
+              <a:t>2025/2/27</a:t>
             </a:fld>
             <a:endParaRPr kumimoji="1" lang="ja-JP" altLang="en-US"/>
           </a:p>
@@ -966,7 +966,7 @@
           <a:p>
             <a:fld id="{E9CC885B-4903-4D54-9A93-00025F12DED9}" type="datetimeFigureOut">
               <a:rPr kumimoji="1" lang="ja-JP" altLang="en-US" smtClean="0"/>
-              <a:t>2025/1/27</a:t>
+              <a:t>2025/2/27</a:t>
             </a:fld>
             <a:endParaRPr kumimoji="1" lang="ja-JP" altLang="en-US"/>
           </a:p>
@@ -1241,7 +1241,7 @@
           <a:p>
             <a:fld id="{E9CC885B-4903-4D54-9A93-00025F12DED9}" type="datetimeFigureOut">
               <a:rPr kumimoji="1" lang="ja-JP" altLang="en-US" smtClean="0"/>
-              <a:t>2025/1/27</a:t>
+              <a:t>2025/2/27</a:t>
             </a:fld>
             <a:endParaRPr kumimoji="1" lang="ja-JP" altLang="en-US"/>
           </a:p>
@@ -1570,7 +1570,7 @@
           <a:p>
             <a:fld id="{E9CC885B-4903-4D54-9A93-00025F12DED9}" type="datetimeFigureOut">
               <a:rPr kumimoji="1" lang="ja-JP" altLang="en-US" smtClean="0"/>
-              <a:t>2025/1/27</a:t>
+              <a:t>2025/2/27</a:t>
             </a:fld>
             <a:endParaRPr kumimoji="1" lang="ja-JP" altLang="en-US"/>
           </a:p>
@@ -2046,7 +2046,7 @@
           <a:p>
             <a:fld id="{E9CC885B-4903-4D54-9A93-00025F12DED9}" type="datetimeFigureOut">
               <a:rPr kumimoji="1" lang="ja-JP" altLang="en-US" smtClean="0"/>
-              <a:t>2025/1/27</a:t>
+              <a:t>2025/2/27</a:t>
             </a:fld>
             <a:endParaRPr kumimoji="1" lang="ja-JP" altLang="en-US"/>
           </a:p>
@@ -2187,7 +2187,7 @@
           <a:p>
             <a:fld id="{E9CC885B-4903-4D54-9A93-00025F12DED9}" type="datetimeFigureOut">
               <a:rPr kumimoji="1" lang="ja-JP" altLang="en-US" smtClean="0"/>
-              <a:t>2025/1/27</a:t>
+              <a:t>2025/2/27</a:t>
             </a:fld>
             <a:endParaRPr kumimoji="1" lang="ja-JP" altLang="en-US"/>
           </a:p>
@@ -2300,7 +2300,7 @@
           <a:p>
             <a:fld id="{E9CC885B-4903-4D54-9A93-00025F12DED9}" type="datetimeFigureOut">
               <a:rPr kumimoji="1" lang="ja-JP" altLang="en-US" smtClean="0"/>
-              <a:t>2025/1/27</a:t>
+              <a:t>2025/2/27</a:t>
             </a:fld>
             <a:endParaRPr kumimoji="1" lang="ja-JP" altLang="en-US"/>
           </a:p>
@@ -2643,7 +2643,7 @@
           <a:p>
             <a:fld id="{E9CC885B-4903-4D54-9A93-00025F12DED9}" type="datetimeFigureOut">
               <a:rPr kumimoji="1" lang="ja-JP" altLang="en-US" smtClean="0"/>
-              <a:t>2025/1/27</a:t>
+              <a:t>2025/2/27</a:t>
             </a:fld>
             <a:endParaRPr kumimoji="1" lang="ja-JP" altLang="en-US"/>
           </a:p>
@@ -2931,7 +2931,7 @@
           <a:p>
             <a:fld id="{E9CC885B-4903-4D54-9A93-00025F12DED9}" type="datetimeFigureOut">
               <a:rPr kumimoji="1" lang="ja-JP" altLang="en-US" smtClean="0"/>
-              <a:t>2025/1/27</a:t>
+              <a:t>2025/2/27</a:t>
             </a:fld>
             <a:endParaRPr kumimoji="1" lang="ja-JP" altLang="en-US"/>
           </a:p>
@@ -3204,7 +3204,7 @@
           <a:p>
             <a:fld id="{E9CC885B-4903-4D54-9A93-00025F12DED9}" type="datetimeFigureOut">
               <a:rPr kumimoji="1" lang="ja-JP" altLang="en-US" smtClean="0"/>
-              <a:t>2025/1/27</a:t>
+              <a:t>2025/2/27</a:t>
             </a:fld>
             <a:endParaRPr kumimoji="1" lang="ja-JP" altLang="en-US"/>
           </a:p>
@@ -4769,10 +4769,18 @@
           <a:lstStyle/>
           <a:p>
             <a:r>
-              <a:rPr lang="ja-JP" altLang="en-US" sz="2400" dirty="0"/>
+              <a:rPr lang="ja-JP" altLang="en-US" sz="2400" b="1" dirty="0">
+                <a:solidFill>
+                  <a:srgbClr val="FF0000"/>
+                </a:solidFill>
+              </a:rPr>
               <a:t>メッセージは必ず書くこと！！</a:t>
             </a:r>
-            <a:endParaRPr lang="en-US" altLang="ja-JP" sz="2400" dirty="0"/>
+            <a:endParaRPr lang="en-US" altLang="ja-JP" sz="2400" b="1" dirty="0">
+              <a:solidFill>
+                <a:srgbClr val="FF0000"/>
+              </a:solidFill>
+            </a:endParaRPr>
           </a:p>
         </p:txBody>
       </p:sp>
@@ -5419,7 +5427,7 @@
         <p:spPr>
           <a:xfrm>
             <a:off x="567542" y="1216429"/>
-            <a:ext cx="7460697" cy="1938992"/>
+            <a:ext cx="8384026" cy="1938992"/>
           </a:xfrm>
           <a:prstGeom prst="rect">
             <a:avLst/>
@@ -5438,7 +5446,7 @@
             </a:r>
             <a:r>
               <a:rPr lang="ja-JP" altLang="en-US" sz="2400" dirty="0"/>
-              <a:t>でコピーしてきたフォルダ内で右クリックし、</a:t>
+              <a:t>したフォルダ内の空いている場所を右クリックし、</a:t>
             </a:r>
             <a:endParaRPr lang="en-US" altLang="ja-JP" sz="2400" dirty="0"/>
           </a:p>
